--- a/Mapped Curriculum Lessons/Grade 6/Lesson 11 - Arcade Tournament/Arcade Tournament - Slides.pptx
+++ b/Mapped Curriculum Lessons/Grade 6/Lesson 11 - Arcade Tournament/Arcade Tournament - Slides.pptx
@@ -2,24 +2,24 @@
 <file path=ppt/presentation.xml><?xml version="1.0" encoding="utf-8"?>
 <p:presentation xmlns:p="http://schemas.openxmlformats.org/presentationml/2006/main" embedTrueTypeFonts="1" saveSubsetFonts="0">
   <p:sldMasterIdLst>
-    <p:sldMasterId xmlns:r="http://schemas.openxmlformats.org/officeDocument/2006/relationships" id="2147483648" r:id="Ra2a01d12fb524b6e"/>
+    <p:sldMasterId xmlns:r="http://schemas.openxmlformats.org/officeDocument/2006/relationships" id="2147483648" r:id="R821602ce65a64bfa"/>
   </p:sldMasterIdLst>
   <p:notesMasterIdLst>
-    <p:notesMasterId xmlns:r="http://schemas.openxmlformats.org/officeDocument/2006/relationships" r:id="Rdb0e4ebf9fb74776"/>
+    <p:notesMasterId xmlns:r="http://schemas.openxmlformats.org/officeDocument/2006/relationships" r:id="R559286e940ec42f9"/>
   </p:notesMasterIdLst>
   <p:sldIdLst>
-    <p:sldId xmlns:r="http://schemas.openxmlformats.org/officeDocument/2006/relationships" id="256" r:id="R41a2dd275a0a4d9d"/>
-    <p:sldId xmlns:r="http://schemas.openxmlformats.org/officeDocument/2006/relationships" id="257" r:id="Rb700904cda5145ba"/>
-    <p:sldId xmlns:r="http://schemas.openxmlformats.org/officeDocument/2006/relationships" id="258" r:id="R7d1a0f5a42f442f9"/>
-    <p:sldId xmlns:r="http://schemas.openxmlformats.org/officeDocument/2006/relationships" id="259" r:id="Rbb8f29f5ed3b40fc"/>
-    <p:sldId xmlns:r="http://schemas.openxmlformats.org/officeDocument/2006/relationships" id="260" r:id="Rffc9a26fe6034338"/>
+    <p:sldId xmlns:r="http://schemas.openxmlformats.org/officeDocument/2006/relationships" id="256" r:id="R2656684738314fcf"/>
+    <p:sldId xmlns:r="http://schemas.openxmlformats.org/officeDocument/2006/relationships" id="257" r:id="R8bff485b38bf4ec3"/>
+    <p:sldId xmlns:r="http://schemas.openxmlformats.org/officeDocument/2006/relationships" id="258" r:id="R7815b598ae23443c"/>
+    <p:sldId xmlns:r="http://schemas.openxmlformats.org/officeDocument/2006/relationships" id="259" r:id="R58e71398ae9642c5"/>
+    <p:sldId xmlns:r="http://schemas.openxmlformats.org/officeDocument/2006/relationships" id="260" r:id="R75d88841b0e1410a"/>
   </p:sldIdLst>
   <p:sldSz cx="12192000" cy="6858000"/>
   <p:notesSz cx="6858000" cy="9144000"/>
   <p:embeddedFontLst>
     <p:embeddedFont>
       <p:font typeface="JetBrains Mono"/>
-      <p:regular xmlns:r="http://schemas.openxmlformats.org/officeDocument/2006/relationships" r:id="R8083550909ec4e40"/>
+      <p:regular xmlns:r="http://schemas.openxmlformats.org/officeDocument/2006/relationships" r:id="R312a47ee79cd4dd7"/>
     </p:embeddedFont>
   </p:embeddedFontLst>
 </p:presentation>
@@ -1027,7 +1027,7 @@
           <p:nvPr/>
         </p:nvPicPr>
         <p:blipFill rotWithShape="1">
-          <a:blip xmlns:r="http://schemas.openxmlformats.org/officeDocument/2006/relationships" xmlns:a="http://schemas.openxmlformats.org/drawingml/2006/main" r:embed="R992853fecec04ca8"/>
+          <a:blip xmlns:r="http://schemas.openxmlformats.org/officeDocument/2006/relationships" xmlns:a="http://schemas.openxmlformats.org/drawingml/2006/main" r:embed="R5e91d65b90db46de"/>
           <a:stretch xmlns:a="http://schemas.openxmlformats.org/drawingml/2006/main"/>
         </p:blipFill>
         <p:spPr>
@@ -1228,7 +1228,7 @@
           <p:nvPr/>
         </p:nvPicPr>
         <p:blipFill rotWithShape="1">
-          <a:blip xmlns:r="http://schemas.openxmlformats.org/officeDocument/2006/relationships" xmlns:a="http://schemas.openxmlformats.org/drawingml/2006/main" r:embed="R2626bd5e6ce84946">
+          <a:blip xmlns:r="http://schemas.openxmlformats.org/officeDocument/2006/relationships" xmlns:a="http://schemas.openxmlformats.org/drawingml/2006/main" r:embed="R3060dbbfad924ee3">
             <a:alphaModFix amt="28000"/>
           </a:blip>
           <a:stretch xmlns:a="http://schemas.openxmlformats.org/drawingml/2006/main"/>
@@ -1441,7 +1441,7 @@
           <p:nvPr/>
         </p:nvPicPr>
         <p:blipFill rotWithShape="1">
-          <a:blip xmlns:r="http://schemas.openxmlformats.org/officeDocument/2006/relationships" xmlns:a="http://schemas.openxmlformats.org/drawingml/2006/main" r:embed="Rb5753e813d874cd3">
+          <a:blip xmlns:r="http://schemas.openxmlformats.org/officeDocument/2006/relationships" xmlns:a="http://schemas.openxmlformats.org/drawingml/2006/main" r:embed="Ra10af0e31231413d">
             <a:alphaModFix amt="28000"/>
           </a:blip>
           <a:stretch xmlns:a="http://schemas.openxmlformats.org/drawingml/2006/main"/>
@@ -1676,7 +1676,7 @@
           <p:nvPr/>
         </p:nvPicPr>
         <p:blipFill rotWithShape="1">
-          <a:blip xmlns:r="http://schemas.openxmlformats.org/officeDocument/2006/relationships" xmlns:a="http://schemas.openxmlformats.org/drawingml/2006/main" r:embed="Rd6c84f29ca164a34">
+          <a:blip xmlns:r="http://schemas.openxmlformats.org/officeDocument/2006/relationships" xmlns:a="http://schemas.openxmlformats.org/drawingml/2006/main" r:embed="Rb46f6c54e1914dfc">
             <a:alphaModFix amt="28000"/>
           </a:blip>
           <a:stretch xmlns:a="http://schemas.openxmlformats.org/drawingml/2006/main"/>
@@ -1953,7 +1953,7 @@
           <p:nvPr/>
         </p:nvPicPr>
         <p:blipFill rotWithShape="1">
-          <a:blip xmlns:r="http://schemas.openxmlformats.org/officeDocument/2006/relationships" xmlns:a="http://schemas.openxmlformats.org/drawingml/2006/main" r:embed="R131c970351774764">
+          <a:blip xmlns:r="http://schemas.openxmlformats.org/officeDocument/2006/relationships" xmlns:a="http://schemas.openxmlformats.org/drawingml/2006/main" r:embed="Rdb4bd991a1a648fa">
             <a:alphaModFix amt="28000"/>
           </a:blip>
           <a:stretch xmlns:a="http://schemas.openxmlformats.org/drawingml/2006/main"/>
@@ -2228,7 +2228,7 @@
           <p:nvPr/>
         </p:nvPicPr>
         <p:blipFill rotWithShape="1">
-          <a:blip xmlns:r="http://schemas.openxmlformats.org/officeDocument/2006/relationships" xmlns:a="http://schemas.openxmlformats.org/drawingml/2006/main" r:embed="R1c5107bc3c694153">
+          <a:blip xmlns:r="http://schemas.openxmlformats.org/officeDocument/2006/relationships" xmlns:a="http://schemas.openxmlformats.org/drawingml/2006/main" r:embed="Rf5727a37c7094542">
             <a:alphaModFix amt="28000"/>
           </a:blip>
           <a:stretch xmlns:a="http://schemas.openxmlformats.org/drawingml/2006/main"/>
@@ -2652,7 +2652,7 @@
           <p:nvPr/>
         </p:nvPicPr>
         <p:blipFill rotWithShape="1">
-          <a:blip xmlns:r="http://schemas.openxmlformats.org/officeDocument/2006/relationships" xmlns:a="http://schemas.openxmlformats.org/drawingml/2006/main" r:embed="R51f4c5eb085f4681">
+          <a:blip xmlns:r="http://schemas.openxmlformats.org/officeDocument/2006/relationships" xmlns:a="http://schemas.openxmlformats.org/drawingml/2006/main" r:embed="R2654ef95990d404c">
             <a:alphaModFix amt="28000"/>
           </a:blip>
           <a:stretch xmlns:a="http://schemas.openxmlformats.org/drawingml/2006/main"/>
@@ -2793,7 +2793,7 @@
           <p:nvPr/>
         </p:nvPicPr>
         <p:blipFill rotWithShape="1">
-          <a:blip xmlns:r="http://schemas.openxmlformats.org/officeDocument/2006/relationships" xmlns:a="http://schemas.openxmlformats.org/drawingml/2006/main" r:embed="R8dd1a8074bb144dc">
+          <a:blip xmlns:r="http://schemas.openxmlformats.org/officeDocument/2006/relationships" xmlns:a="http://schemas.openxmlformats.org/drawingml/2006/main" r:embed="Rf377dc4f766242f4">
             <a:alphaModFix amt="28000"/>
           </a:blip>
           <a:stretch xmlns:a="http://schemas.openxmlformats.org/drawingml/2006/main"/>
@@ -2907,7 +2907,7 @@
           <p:nvPr/>
         </p:nvPicPr>
         <p:blipFill rotWithShape="1">
-          <a:blip xmlns:r="http://schemas.openxmlformats.org/officeDocument/2006/relationships" xmlns:a="http://schemas.openxmlformats.org/drawingml/2006/main" r:embed="Rbf0afb88c29045aa">
+          <a:blip xmlns:r="http://schemas.openxmlformats.org/officeDocument/2006/relationships" xmlns:a="http://schemas.openxmlformats.org/drawingml/2006/main" r:embed="R17504eb7a21a4d44">
             <a:alphaModFix amt="28000"/>
           </a:blip>
           <a:stretch xmlns:a="http://schemas.openxmlformats.org/drawingml/2006/main"/>
@@ -3234,7 +3234,7 @@
           <p:nvPr/>
         </p:nvPicPr>
         <p:blipFill rotWithShape="1">
-          <a:blip xmlns:r="http://schemas.openxmlformats.org/officeDocument/2006/relationships" xmlns:a="http://schemas.openxmlformats.org/drawingml/2006/main" r:embed="R537f81ca97ef450c">
+          <a:blip xmlns:r="http://schemas.openxmlformats.org/officeDocument/2006/relationships" xmlns:a="http://schemas.openxmlformats.org/drawingml/2006/main" r:embed="Re03b1e3a5c154453">
             <a:alphaModFix amt="28000"/>
           </a:blip>
           <a:stretch xmlns:a="http://schemas.openxmlformats.org/drawingml/2006/main"/>
@@ -3522,7 +3522,7 @@
           <p:nvPr/>
         </p:nvPicPr>
         <p:blipFill rotWithShape="1">
-          <a:blip xmlns:r="http://schemas.openxmlformats.org/officeDocument/2006/relationships" xmlns:a="http://schemas.openxmlformats.org/drawingml/2006/main" r:embed="R323184f2985b445a">
+          <a:blip xmlns:r="http://schemas.openxmlformats.org/officeDocument/2006/relationships" xmlns:a="http://schemas.openxmlformats.org/drawingml/2006/main" r:embed="Rc621562d3a7c4830">
             <a:alphaModFix amt="28000"/>
           </a:blip>
           <a:stretch xmlns:a="http://schemas.openxmlformats.org/drawingml/2006/main"/>
@@ -3759,17 +3759,17 @@
   </p:cSld>
   <p:clrMap bg1="lt1" tx1="dk1" bg2="lt2" tx2="dk2" accent1="accent1" accent2="accent2" accent3="accent3" accent4="accent4" accent5="accent5" accent6="accent6" hlink="hlink" folHlink="folHlink"/>
   <p:sldLayoutIdLst>
-    <p:sldLayoutId xmlns:r="http://schemas.openxmlformats.org/officeDocument/2006/relationships" id="2147483649" r:id="R645372a1a1e248d1"/>
-    <p:sldLayoutId xmlns:r="http://schemas.openxmlformats.org/officeDocument/2006/relationships" id="2147483650" r:id="R8738c4b15392479b"/>
-    <p:sldLayoutId xmlns:r="http://schemas.openxmlformats.org/officeDocument/2006/relationships" id="2147483651" r:id="R8e507204b5484a73"/>
-    <p:sldLayoutId xmlns:r="http://schemas.openxmlformats.org/officeDocument/2006/relationships" id="2147483652" r:id="Raedd5f8e5dd14f96"/>
-    <p:sldLayoutId xmlns:r="http://schemas.openxmlformats.org/officeDocument/2006/relationships" id="2147483653" r:id="R394ad7c99cb84398"/>
-    <p:sldLayoutId xmlns:r="http://schemas.openxmlformats.org/officeDocument/2006/relationships" id="2147483654" r:id="R31e967a2bc8f4715"/>
-    <p:sldLayoutId xmlns:r="http://schemas.openxmlformats.org/officeDocument/2006/relationships" id="2147483655" r:id="Rbb9a2dd6855d483a"/>
-    <p:sldLayoutId xmlns:r="http://schemas.openxmlformats.org/officeDocument/2006/relationships" id="2147483656" r:id="R89185d49f587436f"/>
-    <p:sldLayoutId xmlns:r="http://schemas.openxmlformats.org/officeDocument/2006/relationships" id="2147483657" r:id="Rdef631e601cd4bcd"/>
-    <p:sldLayoutId xmlns:r="http://schemas.openxmlformats.org/officeDocument/2006/relationships" id="2147483658" r:id="R02fc086283e44660"/>
-    <p:sldLayoutId xmlns:r="http://schemas.openxmlformats.org/officeDocument/2006/relationships" id="2147483659" r:id="Rc6f511ab67784648"/>
+    <p:sldLayoutId xmlns:r="http://schemas.openxmlformats.org/officeDocument/2006/relationships" id="2147483649" r:id="Rf52c65335003457d"/>
+    <p:sldLayoutId xmlns:r="http://schemas.openxmlformats.org/officeDocument/2006/relationships" id="2147483650" r:id="Rab401a09f9b94986"/>
+    <p:sldLayoutId xmlns:r="http://schemas.openxmlformats.org/officeDocument/2006/relationships" id="2147483651" r:id="R94e060819a7341a6"/>
+    <p:sldLayoutId xmlns:r="http://schemas.openxmlformats.org/officeDocument/2006/relationships" id="2147483652" r:id="Rc95f56c5bc104a46"/>
+    <p:sldLayoutId xmlns:r="http://schemas.openxmlformats.org/officeDocument/2006/relationships" id="2147483653" r:id="Rfef25b964b574a74"/>
+    <p:sldLayoutId xmlns:r="http://schemas.openxmlformats.org/officeDocument/2006/relationships" id="2147483654" r:id="Rd4b8d11a4d9146f0"/>
+    <p:sldLayoutId xmlns:r="http://schemas.openxmlformats.org/officeDocument/2006/relationships" id="2147483655" r:id="R24c45d2e249d48c3"/>
+    <p:sldLayoutId xmlns:r="http://schemas.openxmlformats.org/officeDocument/2006/relationships" id="2147483656" r:id="Ra090c532730047e5"/>
+    <p:sldLayoutId xmlns:r="http://schemas.openxmlformats.org/officeDocument/2006/relationships" id="2147483657" r:id="R994757f8b8fc49b9"/>
+    <p:sldLayoutId xmlns:r="http://schemas.openxmlformats.org/officeDocument/2006/relationships" id="2147483658" r:id="R601dd82ac804473a"/>
+    <p:sldLayoutId xmlns:r="http://schemas.openxmlformats.org/officeDocument/2006/relationships" id="2147483659" r:id="R7aece3be8838434f"/>
   </p:sldLayoutIdLst>
   <p:hf hdr="0" ftr="0" dt="0"/>
   <p:txStyles>
@@ -5050,7 +5050,7 @@
             <a:r>
               <a:rPr sz="1550" b="0">
                 <a:solidFill>
-                  <a:srgbClr val="1750EB"/>
+                  <a:srgbClr val="C45E00"/>
                 </a:solidFill>
                 <a:latin typeface="JetBrains Mono"/>
                 <a:ea typeface="JetBrains Mono"/>
@@ -5072,7 +5072,7 @@
             <a:r>
               <a:rPr sz="1550" b="0">
                 <a:solidFill>
-                  <a:srgbClr val="1750EB"/>
+                  <a:srgbClr val="C45E00"/>
                 </a:solidFill>
                 <a:latin typeface="JetBrains Mono"/>
                 <a:ea typeface="JetBrains Mono"/>
@@ -5094,7 +5094,7 @@
             <a:r>
               <a:rPr sz="1550" b="0">
                 <a:solidFill>
-                  <a:srgbClr val="1750EB"/>
+                  <a:srgbClr val="C45E00"/>
                 </a:solidFill>
                 <a:latin typeface="JetBrains Mono"/>
                 <a:ea typeface="JetBrains Mono"/>
@@ -5440,7 +5440,7 @@
             <a:r>
               <a:rPr sz="1550" b="0">
                 <a:solidFill>
-                  <a:srgbClr val="1750EB"/>
+                  <a:srgbClr val="C45E00"/>
                 </a:solidFill>
                 <a:latin typeface="JetBrains Mono"/>
                 <a:ea typeface="JetBrains Mono"/>
@@ -5786,7 +5786,7 @@
             <a:r>
               <a:rPr sz="1550" b="0">
                 <a:solidFill>
-                  <a:srgbClr val="1750EB"/>
+                  <a:srgbClr val="C45E00"/>
                 </a:solidFill>
                 <a:latin typeface="JetBrains Mono"/>
                 <a:ea typeface="JetBrains Mono"/>
@@ -5808,7 +5808,7 @@
             <a:r>
               <a:rPr sz="1550" b="0">
                 <a:solidFill>
-                  <a:srgbClr val="1750EB"/>
+                  <a:srgbClr val="C45E00"/>
                 </a:solidFill>
                 <a:latin typeface="JetBrains Mono"/>
                 <a:ea typeface="JetBrains Mono"/>

--- a/Mapped Curriculum Lessons/Grade 6/Lesson 11 - Arcade Tournament/Arcade Tournament - Slides.pptx
+++ b/Mapped Curriculum Lessons/Grade 6/Lesson 11 - Arcade Tournament/Arcade Tournament - Slides.pptx
@@ -2,24 +2,24 @@
 <file path=ppt/presentation.xml><?xml version="1.0" encoding="utf-8"?>
 <p:presentation xmlns:p="http://schemas.openxmlformats.org/presentationml/2006/main" embedTrueTypeFonts="1" saveSubsetFonts="0">
   <p:sldMasterIdLst>
-    <p:sldMasterId xmlns:r="http://schemas.openxmlformats.org/officeDocument/2006/relationships" id="2147483648" r:id="R821602ce65a64bfa"/>
+    <p:sldMasterId xmlns:r="http://schemas.openxmlformats.org/officeDocument/2006/relationships" id="2147483648" r:id="Rb879fe34dce449ff"/>
   </p:sldMasterIdLst>
   <p:notesMasterIdLst>
-    <p:notesMasterId xmlns:r="http://schemas.openxmlformats.org/officeDocument/2006/relationships" r:id="R559286e940ec42f9"/>
+    <p:notesMasterId xmlns:r="http://schemas.openxmlformats.org/officeDocument/2006/relationships" r:id="R74b48a2b22fb4080"/>
   </p:notesMasterIdLst>
   <p:sldIdLst>
-    <p:sldId xmlns:r="http://schemas.openxmlformats.org/officeDocument/2006/relationships" id="256" r:id="R2656684738314fcf"/>
-    <p:sldId xmlns:r="http://schemas.openxmlformats.org/officeDocument/2006/relationships" id="257" r:id="R8bff485b38bf4ec3"/>
-    <p:sldId xmlns:r="http://schemas.openxmlformats.org/officeDocument/2006/relationships" id="258" r:id="R7815b598ae23443c"/>
-    <p:sldId xmlns:r="http://schemas.openxmlformats.org/officeDocument/2006/relationships" id="259" r:id="R58e71398ae9642c5"/>
-    <p:sldId xmlns:r="http://schemas.openxmlformats.org/officeDocument/2006/relationships" id="260" r:id="R75d88841b0e1410a"/>
+    <p:sldId xmlns:r="http://schemas.openxmlformats.org/officeDocument/2006/relationships" id="256" r:id="R7f8976de70c1466b"/>
+    <p:sldId xmlns:r="http://schemas.openxmlformats.org/officeDocument/2006/relationships" id="257" r:id="Rbbce347b6ad14251"/>
+    <p:sldId xmlns:r="http://schemas.openxmlformats.org/officeDocument/2006/relationships" id="258" r:id="Raf3a867c180540a0"/>
+    <p:sldId xmlns:r="http://schemas.openxmlformats.org/officeDocument/2006/relationships" id="259" r:id="R13f35451f1a848c4"/>
+    <p:sldId xmlns:r="http://schemas.openxmlformats.org/officeDocument/2006/relationships" id="260" r:id="R87f52d49a44b44ea"/>
   </p:sldIdLst>
   <p:sldSz cx="12192000" cy="6858000"/>
   <p:notesSz cx="6858000" cy="9144000"/>
   <p:embeddedFontLst>
     <p:embeddedFont>
       <p:font typeface="JetBrains Mono"/>
-      <p:regular xmlns:r="http://schemas.openxmlformats.org/officeDocument/2006/relationships" r:id="R312a47ee79cd4dd7"/>
+      <p:regular xmlns:r="http://schemas.openxmlformats.org/officeDocument/2006/relationships" r:id="R610af6711e1d4f40"/>
     </p:embeddedFont>
   </p:embeddedFontLst>
 </p:presentation>
@@ -1027,7 +1027,7 @@
           <p:nvPr/>
         </p:nvPicPr>
         <p:blipFill rotWithShape="1">
-          <a:blip xmlns:r="http://schemas.openxmlformats.org/officeDocument/2006/relationships" xmlns:a="http://schemas.openxmlformats.org/drawingml/2006/main" r:embed="R5e91d65b90db46de"/>
+          <a:blip xmlns:r="http://schemas.openxmlformats.org/officeDocument/2006/relationships" xmlns:a="http://schemas.openxmlformats.org/drawingml/2006/main" r:embed="R08b9067260bd43f8"/>
           <a:stretch xmlns:a="http://schemas.openxmlformats.org/drawingml/2006/main"/>
         </p:blipFill>
         <p:spPr>
@@ -1228,7 +1228,7 @@
           <p:nvPr/>
         </p:nvPicPr>
         <p:blipFill rotWithShape="1">
-          <a:blip xmlns:r="http://schemas.openxmlformats.org/officeDocument/2006/relationships" xmlns:a="http://schemas.openxmlformats.org/drawingml/2006/main" r:embed="R3060dbbfad924ee3">
+          <a:blip xmlns:r="http://schemas.openxmlformats.org/officeDocument/2006/relationships" xmlns:a="http://schemas.openxmlformats.org/drawingml/2006/main" r:embed="R2055827b74cc4f7c">
             <a:alphaModFix amt="28000"/>
           </a:blip>
           <a:stretch xmlns:a="http://schemas.openxmlformats.org/drawingml/2006/main"/>
@@ -1441,7 +1441,7 @@
           <p:nvPr/>
         </p:nvPicPr>
         <p:blipFill rotWithShape="1">
-          <a:blip xmlns:r="http://schemas.openxmlformats.org/officeDocument/2006/relationships" xmlns:a="http://schemas.openxmlformats.org/drawingml/2006/main" r:embed="Ra10af0e31231413d">
+          <a:blip xmlns:r="http://schemas.openxmlformats.org/officeDocument/2006/relationships" xmlns:a="http://schemas.openxmlformats.org/drawingml/2006/main" r:embed="R69e0c58f23204d4c">
             <a:alphaModFix amt="28000"/>
           </a:blip>
           <a:stretch xmlns:a="http://schemas.openxmlformats.org/drawingml/2006/main"/>
@@ -1676,7 +1676,7 @@
           <p:nvPr/>
         </p:nvPicPr>
         <p:blipFill rotWithShape="1">
-          <a:blip xmlns:r="http://schemas.openxmlformats.org/officeDocument/2006/relationships" xmlns:a="http://schemas.openxmlformats.org/drawingml/2006/main" r:embed="Rb46f6c54e1914dfc">
+          <a:blip xmlns:r="http://schemas.openxmlformats.org/officeDocument/2006/relationships" xmlns:a="http://schemas.openxmlformats.org/drawingml/2006/main" r:embed="R6e772d836a124091">
             <a:alphaModFix amt="28000"/>
           </a:blip>
           <a:stretch xmlns:a="http://schemas.openxmlformats.org/drawingml/2006/main"/>
@@ -1953,7 +1953,7 @@
           <p:nvPr/>
         </p:nvPicPr>
         <p:blipFill rotWithShape="1">
-          <a:blip xmlns:r="http://schemas.openxmlformats.org/officeDocument/2006/relationships" xmlns:a="http://schemas.openxmlformats.org/drawingml/2006/main" r:embed="Rdb4bd991a1a648fa">
+          <a:blip xmlns:r="http://schemas.openxmlformats.org/officeDocument/2006/relationships" xmlns:a="http://schemas.openxmlformats.org/drawingml/2006/main" r:embed="Rfa07a8b619ed49eb">
             <a:alphaModFix amt="28000"/>
           </a:blip>
           <a:stretch xmlns:a="http://schemas.openxmlformats.org/drawingml/2006/main"/>
@@ -2228,7 +2228,7 @@
           <p:nvPr/>
         </p:nvPicPr>
         <p:blipFill rotWithShape="1">
-          <a:blip xmlns:r="http://schemas.openxmlformats.org/officeDocument/2006/relationships" xmlns:a="http://schemas.openxmlformats.org/drawingml/2006/main" r:embed="Rf5727a37c7094542">
+          <a:blip xmlns:r="http://schemas.openxmlformats.org/officeDocument/2006/relationships" xmlns:a="http://schemas.openxmlformats.org/drawingml/2006/main" r:embed="R386060474c344ac2">
             <a:alphaModFix amt="28000"/>
           </a:blip>
           <a:stretch xmlns:a="http://schemas.openxmlformats.org/drawingml/2006/main"/>
@@ -2652,7 +2652,7 @@
           <p:nvPr/>
         </p:nvPicPr>
         <p:blipFill rotWithShape="1">
-          <a:blip xmlns:r="http://schemas.openxmlformats.org/officeDocument/2006/relationships" xmlns:a="http://schemas.openxmlformats.org/drawingml/2006/main" r:embed="R2654ef95990d404c">
+          <a:blip xmlns:r="http://schemas.openxmlformats.org/officeDocument/2006/relationships" xmlns:a="http://schemas.openxmlformats.org/drawingml/2006/main" r:embed="R6dc84a7e9118453f">
             <a:alphaModFix amt="28000"/>
           </a:blip>
           <a:stretch xmlns:a="http://schemas.openxmlformats.org/drawingml/2006/main"/>
@@ -2793,7 +2793,7 @@
           <p:nvPr/>
         </p:nvPicPr>
         <p:blipFill rotWithShape="1">
-          <a:blip xmlns:r="http://schemas.openxmlformats.org/officeDocument/2006/relationships" xmlns:a="http://schemas.openxmlformats.org/drawingml/2006/main" r:embed="Rf377dc4f766242f4">
+          <a:blip xmlns:r="http://schemas.openxmlformats.org/officeDocument/2006/relationships" xmlns:a="http://schemas.openxmlformats.org/drawingml/2006/main" r:embed="R6fba1bd0da7c4db1">
             <a:alphaModFix amt="28000"/>
           </a:blip>
           <a:stretch xmlns:a="http://schemas.openxmlformats.org/drawingml/2006/main"/>
@@ -2907,7 +2907,7 @@
           <p:nvPr/>
         </p:nvPicPr>
         <p:blipFill rotWithShape="1">
-          <a:blip xmlns:r="http://schemas.openxmlformats.org/officeDocument/2006/relationships" xmlns:a="http://schemas.openxmlformats.org/drawingml/2006/main" r:embed="R17504eb7a21a4d44">
+          <a:blip xmlns:r="http://schemas.openxmlformats.org/officeDocument/2006/relationships" xmlns:a="http://schemas.openxmlformats.org/drawingml/2006/main" r:embed="R5ee209b985de446c">
             <a:alphaModFix amt="28000"/>
           </a:blip>
           <a:stretch xmlns:a="http://schemas.openxmlformats.org/drawingml/2006/main"/>
@@ -3234,7 +3234,7 @@
           <p:nvPr/>
         </p:nvPicPr>
         <p:blipFill rotWithShape="1">
-          <a:blip xmlns:r="http://schemas.openxmlformats.org/officeDocument/2006/relationships" xmlns:a="http://schemas.openxmlformats.org/drawingml/2006/main" r:embed="Re03b1e3a5c154453">
+          <a:blip xmlns:r="http://schemas.openxmlformats.org/officeDocument/2006/relationships" xmlns:a="http://schemas.openxmlformats.org/drawingml/2006/main" r:embed="R4100739b7e64410a">
             <a:alphaModFix amt="28000"/>
           </a:blip>
           <a:stretch xmlns:a="http://schemas.openxmlformats.org/drawingml/2006/main"/>
@@ -3522,7 +3522,7 @@
           <p:nvPr/>
         </p:nvPicPr>
         <p:blipFill rotWithShape="1">
-          <a:blip xmlns:r="http://schemas.openxmlformats.org/officeDocument/2006/relationships" xmlns:a="http://schemas.openxmlformats.org/drawingml/2006/main" r:embed="Rc621562d3a7c4830">
+          <a:blip xmlns:r="http://schemas.openxmlformats.org/officeDocument/2006/relationships" xmlns:a="http://schemas.openxmlformats.org/drawingml/2006/main" r:embed="Rff4f386d8b114af4">
             <a:alphaModFix amt="28000"/>
           </a:blip>
           <a:stretch xmlns:a="http://schemas.openxmlformats.org/drawingml/2006/main"/>
@@ -3759,17 +3759,17 @@
   </p:cSld>
   <p:clrMap bg1="lt1" tx1="dk1" bg2="lt2" tx2="dk2" accent1="accent1" accent2="accent2" accent3="accent3" accent4="accent4" accent5="accent5" accent6="accent6" hlink="hlink" folHlink="folHlink"/>
   <p:sldLayoutIdLst>
-    <p:sldLayoutId xmlns:r="http://schemas.openxmlformats.org/officeDocument/2006/relationships" id="2147483649" r:id="Rf52c65335003457d"/>
-    <p:sldLayoutId xmlns:r="http://schemas.openxmlformats.org/officeDocument/2006/relationships" id="2147483650" r:id="Rab401a09f9b94986"/>
-    <p:sldLayoutId xmlns:r="http://schemas.openxmlformats.org/officeDocument/2006/relationships" id="2147483651" r:id="R94e060819a7341a6"/>
-    <p:sldLayoutId xmlns:r="http://schemas.openxmlformats.org/officeDocument/2006/relationships" id="2147483652" r:id="Rc95f56c5bc104a46"/>
-    <p:sldLayoutId xmlns:r="http://schemas.openxmlformats.org/officeDocument/2006/relationships" id="2147483653" r:id="Rfef25b964b574a74"/>
-    <p:sldLayoutId xmlns:r="http://schemas.openxmlformats.org/officeDocument/2006/relationships" id="2147483654" r:id="Rd4b8d11a4d9146f0"/>
-    <p:sldLayoutId xmlns:r="http://schemas.openxmlformats.org/officeDocument/2006/relationships" id="2147483655" r:id="R24c45d2e249d48c3"/>
-    <p:sldLayoutId xmlns:r="http://schemas.openxmlformats.org/officeDocument/2006/relationships" id="2147483656" r:id="Ra090c532730047e5"/>
-    <p:sldLayoutId xmlns:r="http://schemas.openxmlformats.org/officeDocument/2006/relationships" id="2147483657" r:id="R994757f8b8fc49b9"/>
-    <p:sldLayoutId xmlns:r="http://schemas.openxmlformats.org/officeDocument/2006/relationships" id="2147483658" r:id="R601dd82ac804473a"/>
-    <p:sldLayoutId xmlns:r="http://schemas.openxmlformats.org/officeDocument/2006/relationships" id="2147483659" r:id="R7aece3be8838434f"/>
+    <p:sldLayoutId xmlns:r="http://schemas.openxmlformats.org/officeDocument/2006/relationships" id="2147483649" r:id="R5e12e05e40c0411c"/>
+    <p:sldLayoutId xmlns:r="http://schemas.openxmlformats.org/officeDocument/2006/relationships" id="2147483650" r:id="Rd521fb036e634ce8"/>
+    <p:sldLayoutId xmlns:r="http://schemas.openxmlformats.org/officeDocument/2006/relationships" id="2147483651" r:id="Rdfcb2c34a4c14413"/>
+    <p:sldLayoutId xmlns:r="http://schemas.openxmlformats.org/officeDocument/2006/relationships" id="2147483652" r:id="R7bb92df5b926491b"/>
+    <p:sldLayoutId xmlns:r="http://schemas.openxmlformats.org/officeDocument/2006/relationships" id="2147483653" r:id="R9ba0130a83294269"/>
+    <p:sldLayoutId xmlns:r="http://schemas.openxmlformats.org/officeDocument/2006/relationships" id="2147483654" r:id="Rb4cb80087b6642fb"/>
+    <p:sldLayoutId xmlns:r="http://schemas.openxmlformats.org/officeDocument/2006/relationships" id="2147483655" r:id="Rfd32688c8e234915"/>
+    <p:sldLayoutId xmlns:r="http://schemas.openxmlformats.org/officeDocument/2006/relationships" id="2147483656" r:id="R26c70e6784374b35"/>
+    <p:sldLayoutId xmlns:r="http://schemas.openxmlformats.org/officeDocument/2006/relationships" id="2147483657" r:id="Rf918d5545bcc415f"/>
+    <p:sldLayoutId xmlns:r="http://schemas.openxmlformats.org/officeDocument/2006/relationships" id="2147483658" r:id="Rb239e84e81bf4a79"/>
+    <p:sldLayoutId xmlns:r="http://schemas.openxmlformats.org/officeDocument/2006/relationships" id="2147483659" r:id="R13fcf4c5df6d4ff1"/>
   </p:sldLayoutIdLst>
   <p:hf hdr="0" ftr="0" dt="0"/>
   <p:txStyles>

--- a/Mapped Curriculum Lessons/Grade 6/Lesson 11 - Arcade Tournament/Arcade Tournament - Slides.pptx
+++ b/Mapped Curriculum Lessons/Grade 6/Lesson 11 - Arcade Tournament/Arcade Tournament - Slides.pptx
@@ -2,24 +2,24 @@
 <file path=ppt/presentation.xml><?xml version="1.0" encoding="utf-8"?>
 <p:presentation xmlns:p="http://schemas.openxmlformats.org/presentationml/2006/main" embedTrueTypeFonts="1" saveSubsetFonts="0">
   <p:sldMasterIdLst>
-    <p:sldMasterId xmlns:r="http://schemas.openxmlformats.org/officeDocument/2006/relationships" id="2147483648" r:id="Rb879fe34dce449ff"/>
+    <p:sldMasterId xmlns:r="http://schemas.openxmlformats.org/officeDocument/2006/relationships" id="2147483648" r:id="Rf7d8d3c596074a19"/>
   </p:sldMasterIdLst>
   <p:notesMasterIdLst>
-    <p:notesMasterId xmlns:r="http://schemas.openxmlformats.org/officeDocument/2006/relationships" r:id="R74b48a2b22fb4080"/>
+    <p:notesMasterId xmlns:r="http://schemas.openxmlformats.org/officeDocument/2006/relationships" r:id="R5744ec23686c490c"/>
   </p:notesMasterIdLst>
   <p:sldIdLst>
-    <p:sldId xmlns:r="http://schemas.openxmlformats.org/officeDocument/2006/relationships" id="256" r:id="R7f8976de70c1466b"/>
-    <p:sldId xmlns:r="http://schemas.openxmlformats.org/officeDocument/2006/relationships" id="257" r:id="Rbbce347b6ad14251"/>
-    <p:sldId xmlns:r="http://schemas.openxmlformats.org/officeDocument/2006/relationships" id="258" r:id="Raf3a867c180540a0"/>
-    <p:sldId xmlns:r="http://schemas.openxmlformats.org/officeDocument/2006/relationships" id="259" r:id="R13f35451f1a848c4"/>
-    <p:sldId xmlns:r="http://schemas.openxmlformats.org/officeDocument/2006/relationships" id="260" r:id="R87f52d49a44b44ea"/>
+    <p:sldId xmlns:r="http://schemas.openxmlformats.org/officeDocument/2006/relationships" id="256" r:id="Rce19b9d7f08640a5"/>
+    <p:sldId xmlns:r="http://schemas.openxmlformats.org/officeDocument/2006/relationships" id="257" r:id="R647c86754cfa4da4"/>
+    <p:sldId xmlns:r="http://schemas.openxmlformats.org/officeDocument/2006/relationships" id="258" r:id="Rd8c0454de2f6427f"/>
+    <p:sldId xmlns:r="http://schemas.openxmlformats.org/officeDocument/2006/relationships" id="259" r:id="Rcdbfa4d4a085419e"/>
+    <p:sldId xmlns:r="http://schemas.openxmlformats.org/officeDocument/2006/relationships" id="260" r:id="R2690d253dcec4b3d"/>
   </p:sldIdLst>
   <p:sldSz cx="12192000" cy="6858000"/>
   <p:notesSz cx="6858000" cy="9144000"/>
   <p:embeddedFontLst>
     <p:embeddedFont>
       <p:font typeface="JetBrains Mono"/>
-      <p:regular xmlns:r="http://schemas.openxmlformats.org/officeDocument/2006/relationships" r:id="R610af6711e1d4f40"/>
+      <p:regular xmlns:r="http://schemas.openxmlformats.org/officeDocument/2006/relationships" r:id="R0d9c25e930ba41f6"/>
     </p:embeddedFont>
   </p:embeddedFontLst>
 </p:presentation>
@@ -1027,7 +1027,7 @@
           <p:nvPr/>
         </p:nvPicPr>
         <p:blipFill rotWithShape="1">
-          <a:blip xmlns:r="http://schemas.openxmlformats.org/officeDocument/2006/relationships" xmlns:a="http://schemas.openxmlformats.org/drawingml/2006/main" r:embed="R08b9067260bd43f8"/>
+          <a:blip xmlns:r="http://schemas.openxmlformats.org/officeDocument/2006/relationships" xmlns:a="http://schemas.openxmlformats.org/drawingml/2006/main" r:embed="R700a0fdd3c924009"/>
           <a:stretch xmlns:a="http://schemas.openxmlformats.org/drawingml/2006/main"/>
         </p:blipFill>
         <p:spPr>
@@ -1228,7 +1228,7 @@
           <p:nvPr/>
         </p:nvPicPr>
         <p:blipFill rotWithShape="1">
-          <a:blip xmlns:r="http://schemas.openxmlformats.org/officeDocument/2006/relationships" xmlns:a="http://schemas.openxmlformats.org/drawingml/2006/main" r:embed="R2055827b74cc4f7c">
+          <a:blip xmlns:r="http://schemas.openxmlformats.org/officeDocument/2006/relationships" xmlns:a="http://schemas.openxmlformats.org/drawingml/2006/main" r:embed="Rbbca068df8384640">
             <a:alphaModFix amt="28000"/>
           </a:blip>
           <a:stretch xmlns:a="http://schemas.openxmlformats.org/drawingml/2006/main"/>
@@ -1441,7 +1441,7 @@
           <p:nvPr/>
         </p:nvPicPr>
         <p:blipFill rotWithShape="1">
-          <a:blip xmlns:r="http://schemas.openxmlformats.org/officeDocument/2006/relationships" xmlns:a="http://schemas.openxmlformats.org/drawingml/2006/main" r:embed="R69e0c58f23204d4c">
+          <a:blip xmlns:r="http://schemas.openxmlformats.org/officeDocument/2006/relationships" xmlns:a="http://schemas.openxmlformats.org/drawingml/2006/main" r:embed="R8373101147db4a87">
             <a:alphaModFix amt="28000"/>
           </a:blip>
           <a:stretch xmlns:a="http://schemas.openxmlformats.org/drawingml/2006/main"/>
@@ -1676,7 +1676,7 @@
           <p:nvPr/>
         </p:nvPicPr>
         <p:blipFill rotWithShape="1">
-          <a:blip xmlns:r="http://schemas.openxmlformats.org/officeDocument/2006/relationships" xmlns:a="http://schemas.openxmlformats.org/drawingml/2006/main" r:embed="R6e772d836a124091">
+          <a:blip xmlns:r="http://schemas.openxmlformats.org/officeDocument/2006/relationships" xmlns:a="http://schemas.openxmlformats.org/drawingml/2006/main" r:embed="Rcfbc4e9dbb5f4257">
             <a:alphaModFix amt="28000"/>
           </a:blip>
           <a:stretch xmlns:a="http://schemas.openxmlformats.org/drawingml/2006/main"/>
@@ -1953,7 +1953,7 @@
           <p:nvPr/>
         </p:nvPicPr>
         <p:blipFill rotWithShape="1">
-          <a:blip xmlns:r="http://schemas.openxmlformats.org/officeDocument/2006/relationships" xmlns:a="http://schemas.openxmlformats.org/drawingml/2006/main" r:embed="Rfa07a8b619ed49eb">
+          <a:blip xmlns:r="http://schemas.openxmlformats.org/officeDocument/2006/relationships" xmlns:a="http://schemas.openxmlformats.org/drawingml/2006/main" r:embed="R8ddf217bd1c04228">
             <a:alphaModFix amt="28000"/>
           </a:blip>
           <a:stretch xmlns:a="http://schemas.openxmlformats.org/drawingml/2006/main"/>
@@ -2228,7 +2228,7 @@
           <p:nvPr/>
         </p:nvPicPr>
         <p:blipFill rotWithShape="1">
-          <a:blip xmlns:r="http://schemas.openxmlformats.org/officeDocument/2006/relationships" xmlns:a="http://schemas.openxmlformats.org/drawingml/2006/main" r:embed="R386060474c344ac2">
+          <a:blip xmlns:r="http://schemas.openxmlformats.org/officeDocument/2006/relationships" xmlns:a="http://schemas.openxmlformats.org/drawingml/2006/main" r:embed="Rf9a9b0a45b5e49da">
             <a:alphaModFix amt="28000"/>
           </a:blip>
           <a:stretch xmlns:a="http://schemas.openxmlformats.org/drawingml/2006/main"/>
@@ -2652,7 +2652,7 @@
           <p:nvPr/>
         </p:nvPicPr>
         <p:blipFill rotWithShape="1">
-          <a:blip xmlns:r="http://schemas.openxmlformats.org/officeDocument/2006/relationships" xmlns:a="http://schemas.openxmlformats.org/drawingml/2006/main" r:embed="R6dc84a7e9118453f">
+          <a:blip xmlns:r="http://schemas.openxmlformats.org/officeDocument/2006/relationships" xmlns:a="http://schemas.openxmlformats.org/drawingml/2006/main" r:embed="Rcd4bbf8993eb4955">
             <a:alphaModFix amt="28000"/>
           </a:blip>
           <a:stretch xmlns:a="http://schemas.openxmlformats.org/drawingml/2006/main"/>
@@ -2793,7 +2793,7 @@
           <p:nvPr/>
         </p:nvPicPr>
         <p:blipFill rotWithShape="1">
-          <a:blip xmlns:r="http://schemas.openxmlformats.org/officeDocument/2006/relationships" xmlns:a="http://schemas.openxmlformats.org/drawingml/2006/main" r:embed="R6fba1bd0da7c4db1">
+          <a:blip xmlns:r="http://schemas.openxmlformats.org/officeDocument/2006/relationships" xmlns:a="http://schemas.openxmlformats.org/drawingml/2006/main" r:embed="R9c3c1389268645cb">
             <a:alphaModFix amt="28000"/>
           </a:blip>
           <a:stretch xmlns:a="http://schemas.openxmlformats.org/drawingml/2006/main"/>
@@ -2907,7 +2907,7 @@
           <p:nvPr/>
         </p:nvPicPr>
         <p:blipFill rotWithShape="1">
-          <a:blip xmlns:r="http://schemas.openxmlformats.org/officeDocument/2006/relationships" xmlns:a="http://schemas.openxmlformats.org/drawingml/2006/main" r:embed="R5ee209b985de446c">
+          <a:blip xmlns:r="http://schemas.openxmlformats.org/officeDocument/2006/relationships" xmlns:a="http://schemas.openxmlformats.org/drawingml/2006/main" r:embed="R834e82aa2b454961">
             <a:alphaModFix amt="28000"/>
           </a:blip>
           <a:stretch xmlns:a="http://schemas.openxmlformats.org/drawingml/2006/main"/>
@@ -3234,7 +3234,7 @@
           <p:nvPr/>
         </p:nvPicPr>
         <p:blipFill rotWithShape="1">
-          <a:blip xmlns:r="http://schemas.openxmlformats.org/officeDocument/2006/relationships" xmlns:a="http://schemas.openxmlformats.org/drawingml/2006/main" r:embed="R4100739b7e64410a">
+          <a:blip xmlns:r="http://schemas.openxmlformats.org/officeDocument/2006/relationships" xmlns:a="http://schemas.openxmlformats.org/drawingml/2006/main" r:embed="Rf84df921e48b45e5">
             <a:alphaModFix amt="28000"/>
           </a:blip>
           <a:stretch xmlns:a="http://schemas.openxmlformats.org/drawingml/2006/main"/>
@@ -3522,7 +3522,7 @@
           <p:nvPr/>
         </p:nvPicPr>
         <p:blipFill rotWithShape="1">
-          <a:blip xmlns:r="http://schemas.openxmlformats.org/officeDocument/2006/relationships" xmlns:a="http://schemas.openxmlformats.org/drawingml/2006/main" r:embed="Rff4f386d8b114af4">
+          <a:blip xmlns:r="http://schemas.openxmlformats.org/officeDocument/2006/relationships" xmlns:a="http://schemas.openxmlformats.org/drawingml/2006/main" r:embed="Rca5717b1d6b24f56">
             <a:alphaModFix amt="28000"/>
           </a:blip>
           <a:stretch xmlns:a="http://schemas.openxmlformats.org/drawingml/2006/main"/>
@@ -3759,17 +3759,17 @@
   </p:cSld>
   <p:clrMap bg1="lt1" tx1="dk1" bg2="lt2" tx2="dk2" accent1="accent1" accent2="accent2" accent3="accent3" accent4="accent4" accent5="accent5" accent6="accent6" hlink="hlink" folHlink="folHlink"/>
   <p:sldLayoutIdLst>
-    <p:sldLayoutId xmlns:r="http://schemas.openxmlformats.org/officeDocument/2006/relationships" id="2147483649" r:id="R5e12e05e40c0411c"/>
-    <p:sldLayoutId xmlns:r="http://schemas.openxmlformats.org/officeDocument/2006/relationships" id="2147483650" r:id="Rd521fb036e634ce8"/>
-    <p:sldLayoutId xmlns:r="http://schemas.openxmlformats.org/officeDocument/2006/relationships" id="2147483651" r:id="Rdfcb2c34a4c14413"/>
-    <p:sldLayoutId xmlns:r="http://schemas.openxmlformats.org/officeDocument/2006/relationships" id="2147483652" r:id="R7bb92df5b926491b"/>
-    <p:sldLayoutId xmlns:r="http://schemas.openxmlformats.org/officeDocument/2006/relationships" id="2147483653" r:id="R9ba0130a83294269"/>
-    <p:sldLayoutId xmlns:r="http://schemas.openxmlformats.org/officeDocument/2006/relationships" id="2147483654" r:id="Rb4cb80087b6642fb"/>
-    <p:sldLayoutId xmlns:r="http://schemas.openxmlformats.org/officeDocument/2006/relationships" id="2147483655" r:id="Rfd32688c8e234915"/>
-    <p:sldLayoutId xmlns:r="http://schemas.openxmlformats.org/officeDocument/2006/relationships" id="2147483656" r:id="R26c70e6784374b35"/>
-    <p:sldLayoutId xmlns:r="http://schemas.openxmlformats.org/officeDocument/2006/relationships" id="2147483657" r:id="Rf918d5545bcc415f"/>
-    <p:sldLayoutId xmlns:r="http://schemas.openxmlformats.org/officeDocument/2006/relationships" id="2147483658" r:id="Rb239e84e81bf4a79"/>
-    <p:sldLayoutId xmlns:r="http://schemas.openxmlformats.org/officeDocument/2006/relationships" id="2147483659" r:id="R13fcf4c5df6d4ff1"/>
+    <p:sldLayoutId xmlns:r="http://schemas.openxmlformats.org/officeDocument/2006/relationships" id="2147483649" r:id="R8c305d9c7ba44f30"/>
+    <p:sldLayoutId xmlns:r="http://schemas.openxmlformats.org/officeDocument/2006/relationships" id="2147483650" r:id="R9af611f537344522"/>
+    <p:sldLayoutId xmlns:r="http://schemas.openxmlformats.org/officeDocument/2006/relationships" id="2147483651" r:id="R7343a462cddb4d24"/>
+    <p:sldLayoutId xmlns:r="http://schemas.openxmlformats.org/officeDocument/2006/relationships" id="2147483652" r:id="R6b29be9ea4a049dd"/>
+    <p:sldLayoutId xmlns:r="http://schemas.openxmlformats.org/officeDocument/2006/relationships" id="2147483653" r:id="R435ea4606e6f4062"/>
+    <p:sldLayoutId xmlns:r="http://schemas.openxmlformats.org/officeDocument/2006/relationships" id="2147483654" r:id="Rcc1ed0db50d341d7"/>
+    <p:sldLayoutId xmlns:r="http://schemas.openxmlformats.org/officeDocument/2006/relationships" id="2147483655" r:id="Re7acdbf4837b4962"/>
+    <p:sldLayoutId xmlns:r="http://schemas.openxmlformats.org/officeDocument/2006/relationships" id="2147483656" r:id="R70a817c113694f12"/>
+    <p:sldLayoutId xmlns:r="http://schemas.openxmlformats.org/officeDocument/2006/relationships" id="2147483657" r:id="R108195470e5a4b4d"/>
+    <p:sldLayoutId xmlns:r="http://schemas.openxmlformats.org/officeDocument/2006/relationships" id="2147483658" r:id="Rdf7a47dc43b64954"/>
+    <p:sldLayoutId xmlns:r="http://schemas.openxmlformats.org/officeDocument/2006/relationships" id="2147483659" r:id="R568478975ba749b9"/>
   </p:sldLayoutIdLst>
   <p:hf hdr="0" ftr="0" dt="0"/>
   <p:txStyles>
